--- a/Защита/OTChET.pptx
+++ b/Защита/OTChET.pptx
@@ -5,15 +5,19 @@
     <p:sldMasterId id="2147483660" r:id="rId1"/>
   </p:sldMasterIdLst>
   <p:notesMasterIdLst>
-    <p:notesMasterId r:id="rId8"/>
+    <p:notesMasterId r:id="rId12"/>
   </p:notesMasterIdLst>
   <p:sldIdLst>
     <p:sldId id="256" r:id="rId2"/>
-    <p:sldId id="257" r:id="rId3"/>
-    <p:sldId id="258" r:id="rId4"/>
-    <p:sldId id="259" r:id="rId5"/>
-    <p:sldId id="260" r:id="rId6"/>
-    <p:sldId id="261" r:id="rId7"/>
+    <p:sldId id="262" r:id="rId3"/>
+    <p:sldId id="263" r:id="rId4"/>
+    <p:sldId id="265" r:id="rId5"/>
+    <p:sldId id="257" r:id="rId6"/>
+    <p:sldId id="258" r:id="rId7"/>
+    <p:sldId id="259" r:id="rId8"/>
+    <p:sldId id="260" r:id="rId9"/>
+    <p:sldId id="261" r:id="rId10"/>
+    <p:sldId id="264" r:id="rId11"/>
   </p:sldIdLst>
   <p:sldSz cx="12192000" cy="6858000"/>
   <p:notesSz cx="6858000" cy="9144000"/>
@@ -202,7 +206,7 @@
           <a:p>
             <a:fld id="{2F8EE06E-6907-46DC-B298-B4B1011CDA1B}" type="datetimeFigureOut">
               <a:rPr lang="ru-RU" smtClean="0"/>
-              <a:t>20.04.2026</a:t>
+              <a:t>21.04.2026</a:t>
             </a:fld>
             <a:endParaRPr lang="ru-RU"/>
           </a:p>
@@ -534,7 +538,7 @@
           <a:p>
             <a:fld id="{85FBC5A2-0286-485C-BC63-46CDB546D6D9}" type="slidenum">
               <a:rPr lang="ru-RU" smtClean="0"/>
-              <a:t>6</a:t>
+              <a:t>9</a:t>
             </a:fld>
             <a:endParaRPr lang="ru-RU"/>
           </a:p>
@@ -741,7 +745,7 @@
           <a:p>
             <a:fld id="{5FC06136-4108-482B-AFFF-106B86E39634}" type="datetimeFigureOut">
               <a:rPr lang="ru-RU" smtClean="0"/>
-              <a:t>20.04.2026</a:t>
+              <a:t>21.04.2026</a:t>
             </a:fld>
             <a:endParaRPr lang="ru-RU"/>
           </a:p>
@@ -1079,7 +1083,7 @@
           <a:p>
             <a:fld id="{5FC06136-4108-482B-AFFF-106B86E39634}" type="datetimeFigureOut">
               <a:rPr lang="ru-RU" smtClean="0"/>
-              <a:t>20.04.2026</a:t>
+              <a:t>21.04.2026</a:t>
             </a:fld>
             <a:endParaRPr lang="ru-RU"/>
           </a:p>
@@ -1480,7 +1484,7 @@
           <a:p>
             <a:fld id="{5FC06136-4108-482B-AFFF-106B86E39634}" type="datetimeFigureOut">
               <a:rPr lang="ru-RU" smtClean="0"/>
-              <a:t>20.04.2026</a:t>
+              <a:t>21.04.2026</a:t>
             </a:fld>
             <a:endParaRPr lang="ru-RU"/>
           </a:p>
@@ -1816,7 +1820,7 @@
           <a:p>
             <a:fld id="{5FC06136-4108-482B-AFFF-106B86E39634}" type="datetimeFigureOut">
               <a:rPr lang="ru-RU" smtClean="0"/>
-              <a:t>20.04.2026</a:t>
+              <a:t>21.04.2026</a:t>
             </a:fld>
             <a:endParaRPr lang="ru-RU"/>
           </a:p>
@@ -2136,7 +2140,7 @@
           <a:p>
             <a:fld id="{5FC06136-4108-482B-AFFF-106B86E39634}" type="datetimeFigureOut">
               <a:rPr lang="ru-RU" smtClean="0"/>
-              <a:t>20.04.2026</a:t>
+              <a:t>21.04.2026</a:t>
             </a:fld>
             <a:endParaRPr lang="ru-RU"/>
           </a:p>
@@ -2532,7 +2536,7 @@
           <a:p>
             <a:fld id="{5FC06136-4108-482B-AFFF-106B86E39634}" type="datetimeFigureOut">
               <a:rPr lang="ru-RU" smtClean="0"/>
-              <a:t>20.04.2026</a:t>
+              <a:t>21.04.2026</a:t>
             </a:fld>
             <a:endParaRPr lang="ru-RU"/>
           </a:p>
@@ -2789,7 +2793,7 @@
           <a:p>
             <a:fld id="{5FC06136-4108-482B-AFFF-106B86E39634}" type="datetimeFigureOut">
               <a:rPr lang="ru-RU" smtClean="0"/>
-              <a:t>20.04.2026</a:t>
+              <a:t>21.04.2026</a:t>
             </a:fld>
             <a:endParaRPr lang="ru-RU"/>
           </a:p>
@@ -3051,7 +3055,7 @@
           <a:p>
             <a:fld id="{5FC06136-4108-482B-AFFF-106B86E39634}" type="datetimeFigureOut">
               <a:rPr lang="ru-RU" smtClean="0"/>
-              <a:t>20.04.2026</a:t>
+              <a:t>21.04.2026</a:t>
             </a:fld>
             <a:endParaRPr lang="ru-RU"/>
           </a:p>
@@ -3313,7 +3317,7 @@
           <a:p>
             <a:fld id="{5FC06136-4108-482B-AFFF-106B86E39634}" type="datetimeFigureOut">
               <a:rPr lang="ru-RU" smtClean="0"/>
-              <a:t>20.04.2026</a:t>
+              <a:t>21.04.2026</a:t>
             </a:fld>
             <a:endParaRPr lang="ru-RU"/>
           </a:p>
@@ -3642,7 +3646,7 @@
           <a:p>
             <a:fld id="{5FC06136-4108-482B-AFFF-106B86E39634}" type="datetimeFigureOut">
               <a:rPr lang="ru-RU" smtClean="0"/>
-              <a:t>20.04.2026</a:t>
+              <a:t>21.04.2026</a:t>
             </a:fld>
             <a:endParaRPr lang="ru-RU"/>
           </a:p>
@@ -3965,7 +3969,7 @@
           <a:p>
             <a:fld id="{5FC06136-4108-482B-AFFF-106B86E39634}" type="datetimeFigureOut">
               <a:rPr lang="ru-RU" smtClean="0"/>
-              <a:t>20.04.2026</a:t>
+              <a:t>21.04.2026</a:t>
             </a:fld>
             <a:endParaRPr lang="ru-RU"/>
           </a:p>
@@ -4422,7 +4426,7 @@
           <a:p>
             <a:fld id="{5FC06136-4108-482B-AFFF-106B86E39634}" type="datetimeFigureOut">
               <a:rPr lang="ru-RU" smtClean="0"/>
-              <a:t>20.04.2026</a:t>
+              <a:t>21.04.2026</a:t>
             </a:fld>
             <a:endParaRPr lang="ru-RU"/>
           </a:p>
@@ -4627,7 +4631,7 @@
           <a:p>
             <a:fld id="{5FC06136-4108-482B-AFFF-106B86E39634}" type="datetimeFigureOut">
               <a:rPr lang="ru-RU" smtClean="0"/>
-              <a:t>20.04.2026</a:t>
+              <a:t>21.04.2026</a:t>
             </a:fld>
             <a:endParaRPr lang="ru-RU"/>
           </a:p>
@@ -4804,7 +4808,7 @@
           <a:p>
             <a:fld id="{5FC06136-4108-482B-AFFF-106B86E39634}" type="datetimeFigureOut">
               <a:rPr lang="ru-RU" smtClean="0"/>
-              <a:t>20.04.2026</a:t>
+              <a:t>21.04.2026</a:t>
             </a:fld>
             <a:endParaRPr lang="ru-RU"/>
           </a:p>
@@ -5137,7 +5141,7 @@
           <a:p>
             <a:fld id="{5FC06136-4108-482B-AFFF-106B86E39634}" type="datetimeFigureOut">
               <a:rPr lang="ru-RU" smtClean="0"/>
-              <a:t>20.04.2026</a:t>
+              <a:t>21.04.2026</a:t>
             </a:fld>
             <a:endParaRPr lang="ru-RU"/>
           </a:p>
@@ -5482,7 +5486,7 @@
           <a:p>
             <a:fld id="{5FC06136-4108-482B-AFFF-106B86E39634}" type="datetimeFigureOut">
               <a:rPr lang="ru-RU" smtClean="0"/>
-              <a:t>20.04.2026</a:t>
+              <a:t>21.04.2026</a:t>
             </a:fld>
             <a:endParaRPr lang="ru-RU"/>
           </a:p>
@@ -7599,7 +7603,7 @@
           <a:p>
             <a:fld id="{5FC06136-4108-482B-AFFF-106B86E39634}" type="datetimeFigureOut">
               <a:rPr lang="ru-RU" smtClean="0"/>
-              <a:t>20.04.2026</a:t>
+              <a:t>21.04.2026</a:t>
             </a:fld>
             <a:endParaRPr lang="ru-RU"/>
           </a:p>
@@ -8135,7 +8139,7 @@
         </p:nvSpPr>
         <p:spPr>
           <a:xfrm>
-            <a:off x="1524000" y="1482290"/>
+            <a:off x="1145406" y="1779525"/>
             <a:ext cx="9144000" cy="2290813"/>
           </a:xfrm>
         </p:spPr>
@@ -8146,34 +8150,61 @@
           <a:lstStyle/>
           <a:p>
             <a:r>
-              <a:rPr lang="ru-RU" sz="2800" b="1" dirty="0"/>
+              <a:rPr lang="ru-RU" sz="2800" b="1" dirty="0">
+                <a:latin typeface="Times New Roman" panose="02020603050405020304" pitchFamily="18" charset="0"/>
+                <a:cs typeface="Times New Roman" panose="02020603050405020304" pitchFamily="18" charset="0"/>
+              </a:rPr>
               <a:t>ОТЧЕТ</a:t>
             </a:r>
             <a:br>
-              <a:rPr lang="ru-RU" sz="2800" b="1" dirty="0"/>
+              <a:rPr lang="ru-RU" sz="2800" b="1" dirty="0">
+                <a:latin typeface="Times New Roman" panose="02020603050405020304" pitchFamily="18" charset="0"/>
+                <a:cs typeface="Times New Roman" panose="02020603050405020304" pitchFamily="18" charset="0"/>
+              </a:rPr>
             </a:br>
             <a:br>
-              <a:rPr lang="ru-RU" sz="2800" dirty="0"/>
+              <a:rPr lang="ru-RU" sz="2800" dirty="0">
+                <a:latin typeface="Times New Roman" panose="02020603050405020304" pitchFamily="18" charset="0"/>
+                <a:cs typeface="Times New Roman" panose="02020603050405020304" pitchFamily="18" charset="0"/>
+              </a:rPr>
             </a:br>
             <a:r>
-              <a:rPr lang="ru-RU" sz="2800" b="1" dirty="0"/>
+              <a:rPr lang="ru-RU" sz="2800" b="1" dirty="0">
+                <a:latin typeface="Times New Roman" panose="02020603050405020304" pitchFamily="18" charset="0"/>
+                <a:cs typeface="Times New Roman" panose="02020603050405020304" pitchFamily="18" charset="0"/>
+              </a:rPr>
               <a:t> по учебной практике</a:t>
             </a:r>
             <a:br>
-              <a:rPr lang="ru-RU" sz="2800" dirty="0"/>
+              <a:rPr lang="ru-RU" sz="2800" dirty="0">
+                <a:latin typeface="Times New Roman" panose="02020603050405020304" pitchFamily="18" charset="0"/>
+                <a:cs typeface="Times New Roman" panose="02020603050405020304" pitchFamily="18" charset="0"/>
+              </a:rPr>
             </a:br>
             <a:r>
-              <a:rPr lang="ru-RU" sz="2800" b="1" dirty="0"/>
+              <a:rPr lang="ru-RU" sz="2800" b="1" dirty="0">
+                <a:latin typeface="Times New Roman" panose="02020603050405020304" pitchFamily="18" charset="0"/>
+                <a:cs typeface="Times New Roman" panose="02020603050405020304" pitchFamily="18" charset="0"/>
+              </a:rPr>
               <a:t>ПМ11. Разработка, администрирование и защита баз данных</a:t>
             </a:r>
             <a:br>
-              <a:rPr lang="ru-RU" sz="5400" dirty="0"/>
+              <a:rPr lang="ru-RU" sz="5400" dirty="0">
+                <a:latin typeface="Times New Roman" panose="02020603050405020304" pitchFamily="18" charset="0"/>
+                <a:cs typeface="Times New Roman" panose="02020603050405020304" pitchFamily="18" charset="0"/>
+              </a:rPr>
             </a:br>
             <a:r>
-              <a:rPr lang="ru-RU" sz="2800" dirty="0"/>
+              <a:rPr lang="ru-RU" sz="2800" dirty="0">
+                <a:latin typeface="Times New Roman" panose="02020603050405020304" pitchFamily="18" charset="0"/>
+                <a:cs typeface="Times New Roman" panose="02020603050405020304" pitchFamily="18" charset="0"/>
+              </a:rPr>
               <a:t>Тема: Разработка системы «ХранительПРО» для организации пропускного режима на объекте КИИ</a:t>
             </a:r>
-            <a:endParaRPr lang="ru-RU" sz="5400" dirty="0"/>
+            <a:endParaRPr lang="ru-RU" sz="5400" dirty="0">
+              <a:latin typeface="Times New Roman" panose="02020603050405020304" pitchFamily="18" charset="0"/>
+              <a:cs typeface="Times New Roman" panose="02020603050405020304" pitchFamily="18" charset="0"/>
+            </a:endParaRPr>
           </a:p>
         </p:txBody>
       </p:sp>
@@ -8195,7 +8226,7 @@
         </p:nvSpPr>
         <p:spPr>
           <a:xfrm>
-            <a:off x="1524000" y="246355"/>
+            <a:off x="1326038" y="130851"/>
             <a:ext cx="9144000" cy="1235935"/>
           </a:xfrm>
         </p:spPr>
@@ -8205,31 +8236,51 @@
           </a:bodyPr>
           <a:lstStyle/>
           <a:p>
-            <a:r>
-              <a:rPr lang="ru-RU" dirty="0"/>
+            <a:pPr algn="ctr"/>
+            <a:r>
+              <a:rPr lang="ru-RU" dirty="0">
+                <a:latin typeface="Times New Roman" panose="02020603050405020304" pitchFamily="18" charset="0"/>
+                <a:cs typeface="Times New Roman" panose="02020603050405020304" pitchFamily="18" charset="0"/>
+              </a:rPr>
               <a:t>МИНИСТЕРСТВО ОБРАЗОВАНИЯ КИРОВСКОЙ ОБЛАСТИ</a:t>
             </a:r>
           </a:p>
           <a:p>
-            <a:r>
-              <a:rPr lang="ru-RU" dirty="0"/>
+            <a:pPr algn="ctr"/>
+            <a:r>
+              <a:rPr lang="ru-RU" dirty="0">
+                <a:latin typeface="Times New Roman" panose="02020603050405020304" pitchFamily="18" charset="0"/>
+                <a:cs typeface="Times New Roman" panose="02020603050405020304" pitchFamily="18" charset="0"/>
+              </a:rPr>
               <a:t>Кировское областное государственное профессиональное образовательное </a:t>
             </a:r>
           </a:p>
           <a:p>
-            <a:r>
-              <a:rPr lang="ru-RU" dirty="0"/>
+            <a:pPr algn="ctr"/>
+            <a:r>
+              <a:rPr lang="ru-RU" dirty="0">
+                <a:latin typeface="Times New Roman" panose="02020603050405020304" pitchFamily="18" charset="0"/>
+                <a:cs typeface="Times New Roman" panose="02020603050405020304" pitchFamily="18" charset="0"/>
+              </a:rPr>
               <a:t> бюджетное учреждение  </a:t>
             </a:r>
           </a:p>
           <a:p>
-            <a:r>
-              <a:rPr lang="ru-RU" dirty="0"/>
+            <a:pPr algn="ctr"/>
+            <a:r>
+              <a:rPr lang="ru-RU" dirty="0">
+                <a:latin typeface="Times New Roman" panose="02020603050405020304" pitchFamily="18" charset="0"/>
+                <a:cs typeface="Times New Roman" panose="02020603050405020304" pitchFamily="18" charset="0"/>
+              </a:rPr>
               <a:t>«Слободской колледж педагогики и социальных отношений»</a:t>
             </a:r>
           </a:p>
           <a:p>
-            <a:endParaRPr lang="ru-RU" dirty="0"/>
+            <a:pPr algn="ctr"/>
+            <a:endParaRPr lang="ru-RU" dirty="0">
+              <a:latin typeface="Times New Roman" panose="02020603050405020304" pitchFamily="18" charset="0"/>
+              <a:cs typeface="Times New Roman" panose="02020603050405020304" pitchFamily="18" charset="0"/>
+            </a:endParaRPr>
           </a:p>
         </p:txBody>
       </p:sp>
@@ -8249,7 +8300,7 @@
         </p:nvSpPr>
         <p:spPr>
           <a:xfrm>
-            <a:off x="5717406" y="3933068"/>
+            <a:off x="5717406" y="4070338"/>
             <a:ext cx="6296526" cy="2024970"/>
           </a:xfrm>
           <a:prstGeom prst="rect">
@@ -8258,7 +8309,7 @@
         </p:spPr>
         <p:txBody>
           <a:bodyPr vert="horz" lIns="91440" tIns="45720" rIns="91440" bIns="45720" rtlCol="0">
-            <a:normAutofit fontScale="85000" lnSpcReduction="10000"/>
+            <a:normAutofit fontScale="92500"/>
           </a:bodyPr>
           <a:lstStyle>
             <a:lvl1pPr marL="0" indent="0" algn="ctr" defTabSz="914400" rtl="0" eaLnBrk="1" latinLnBrk="0" hangingPunct="1">
@@ -8427,28 +8478,40 @@
           <a:p>
             <a:pPr algn="r"/>
             <a:r>
-              <a:rPr lang="ru-RU" dirty="0"/>
+              <a:rPr lang="ru-RU" dirty="0">
+                <a:latin typeface="Times New Roman" panose="02020603050405020304" pitchFamily="18" charset="0"/>
+                <a:cs typeface="Times New Roman" panose="02020603050405020304" pitchFamily="18" charset="0"/>
+              </a:rPr>
               <a:t>Выполнила: Красноперова Ульяна Анатольевна</a:t>
             </a:r>
           </a:p>
           <a:p>
             <a:pPr algn="r"/>
             <a:r>
-              <a:rPr lang="ru-RU" dirty="0"/>
+              <a:rPr lang="ru-RU" dirty="0">
+                <a:latin typeface="Times New Roman" panose="02020603050405020304" pitchFamily="18" charset="0"/>
+                <a:cs typeface="Times New Roman" panose="02020603050405020304" pitchFamily="18" charset="0"/>
+              </a:rPr>
               <a:t>Группа: 23П-2</a:t>
             </a:r>
           </a:p>
           <a:p>
             <a:pPr algn="r"/>
             <a:r>
-              <a:rPr lang="ru-RU" dirty="0"/>
+              <a:rPr lang="ru-RU" dirty="0">
+                <a:latin typeface="Times New Roman" panose="02020603050405020304" pitchFamily="18" charset="0"/>
+                <a:cs typeface="Times New Roman" panose="02020603050405020304" pitchFamily="18" charset="0"/>
+              </a:rPr>
               <a:t>Специальность: 09.02.07 Информационные системы и программирование</a:t>
             </a:r>
           </a:p>
           <a:p>
             <a:pPr algn="r"/>
             <a:r>
-              <a:rPr lang="ru-RU" dirty="0"/>
+              <a:rPr lang="ru-RU" dirty="0">
+                <a:latin typeface="Times New Roman" panose="02020603050405020304" pitchFamily="18" charset="0"/>
+                <a:cs typeface="Times New Roman" panose="02020603050405020304" pitchFamily="18" charset="0"/>
+              </a:rPr>
               <a:t>Руководитель: Калинин Арсений Олегович</a:t>
             </a:r>
           </a:p>
@@ -8647,7 +8710,10 @@
           </a:lstStyle>
           <a:p>
             <a:r>
-              <a:rPr lang="ru-RU" dirty="0"/>
+              <a:rPr lang="ru-RU" dirty="0">
+                <a:latin typeface="Times New Roman" panose="02020603050405020304" pitchFamily="18" charset="0"/>
+                <a:cs typeface="Times New Roman" panose="02020603050405020304" pitchFamily="18" charset="0"/>
+              </a:rPr>
               <a:t>2026г.</a:t>
             </a:r>
           </a:p>
@@ -8657,6 +8723,162 @@
     <p:extLst>
       <p:ext uri="{BB962C8B-B14F-4D97-AF65-F5344CB8AC3E}">
         <p14:creationId xmlns:p14="http://schemas.microsoft.com/office/powerpoint/2010/main" val="895426245"/>
+      </p:ext>
+    </p:extLst>
+  </p:cSld>
+  <p:clrMapOvr>
+    <a:masterClrMapping/>
+  </p:clrMapOvr>
+</p:sld>
+</file>
+
+<file path=ppt/slides/slide10.xml><?xml version="1.0" encoding="utf-8"?>
+<p:sld xmlns:a="http://schemas.openxmlformats.org/drawingml/2006/main" xmlns:r="http://schemas.openxmlformats.org/officeDocument/2006/relationships" xmlns:p="http://schemas.openxmlformats.org/presentationml/2006/main">
+  <p:cSld>
+    <p:spTree>
+      <p:nvGrpSpPr>
+        <p:cNvPr id="1" name=""/>
+        <p:cNvGrpSpPr/>
+        <p:nvPr/>
+      </p:nvGrpSpPr>
+      <p:grpSpPr>
+        <a:xfrm>
+          <a:off x="0" y="0"/>
+          <a:ext cx="0" cy="0"/>
+          <a:chOff x="0" y="0"/>
+          <a:chExt cx="0" cy="0"/>
+        </a:xfrm>
+      </p:grpSpPr>
+      <p:sp>
+        <p:nvSpPr>
+          <p:cNvPr id="2" name="Заголовок 1">
+            <a:extLst>
+              <a:ext uri="{FF2B5EF4-FFF2-40B4-BE49-F238E27FC236}">
+                <a16:creationId xmlns:a16="http://schemas.microsoft.com/office/drawing/2014/main" id="{1CD0026A-DACF-76D3-35F5-B474B48EDE4C}"/>
+              </a:ext>
+            </a:extLst>
+          </p:cNvPr>
+          <p:cNvSpPr>
+            <a:spLocks noGrp="1"/>
+          </p:cNvSpPr>
+          <p:nvPr>
+            <p:ph type="title"/>
+          </p:nvPr>
+        </p:nvSpPr>
+        <p:spPr/>
+        <p:txBody>
+          <a:bodyPr/>
+          <a:lstStyle/>
+          <a:p>
+            <a:r>
+              <a:rPr lang="ru-RU" dirty="0"/>
+              <a:t>Заключение</a:t>
+            </a:r>
+          </a:p>
+        </p:txBody>
+      </p:sp>
+      <p:sp>
+        <p:nvSpPr>
+          <p:cNvPr id="3" name="Объект 2">
+            <a:extLst>
+              <a:ext uri="{FF2B5EF4-FFF2-40B4-BE49-F238E27FC236}">
+                <a16:creationId xmlns:a16="http://schemas.microsoft.com/office/drawing/2014/main" id="{0581458E-2636-3413-AE3F-7751A54CD99D}"/>
+              </a:ext>
+            </a:extLst>
+          </p:cNvPr>
+          <p:cNvSpPr>
+            <a:spLocks noGrp="1"/>
+          </p:cNvSpPr>
+          <p:nvPr>
+            <p:ph idx="1"/>
+          </p:nvPr>
+        </p:nvSpPr>
+        <p:spPr/>
+        <p:txBody>
+          <a:bodyPr>
+            <a:normAutofit/>
+          </a:bodyPr>
+          <a:lstStyle/>
+          <a:p>
+            <a:r>
+              <a:rPr lang="ru-RU" sz="2400" dirty="0">
+                <a:latin typeface="Times New Roman" panose="02020603050405020304" pitchFamily="18" charset="0"/>
+                <a:cs typeface="Times New Roman" panose="02020603050405020304" pitchFamily="18" charset="0"/>
+              </a:rPr>
+              <a:t>На основе описания предметной области, текста задания, имеющихся макетов, исходных данных разработана база данных в выбранной СУБД. </a:t>
+            </a:r>
+          </a:p>
+          <a:p>
+            <a:r>
+              <a:rPr lang="ru-RU" sz="2400" dirty="0">
+                <a:latin typeface="Times New Roman" panose="02020603050405020304" pitchFamily="18" charset="0"/>
+                <a:cs typeface="Times New Roman" panose="02020603050405020304" pitchFamily="18" charset="0"/>
+              </a:rPr>
+              <a:t>На практике ПМ11 я научилась работать в </a:t>
+            </a:r>
+            <a:r>
+              <a:rPr lang="en-US" sz="2400" dirty="0" err="1">
+                <a:latin typeface="Times New Roman" panose="02020603050405020304" pitchFamily="18" charset="0"/>
+                <a:cs typeface="Times New Roman" panose="02020603050405020304" pitchFamily="18" charset="0"/>
+              </a:rPr>
+              <a:t>PostgresSQL</a:t>
+            </a:r>
+            <a:r>
+              <a:rPr lang="en-US" sz="2400" dirty="0">
+                <a:latin typeface="Times New Roman" panose="02020603050405020304" pitchFamily="18" charset="0"/>
+                <a:cs typeface="Times New Roman" panose="02020603050405020304" pitchFamily="18" charset="0"/>
+              </a:rPr>
+              <a:t>,</a:t>
+            </a:r>
+            <a:r>
+              <a:rPr lang="ru-RU" sz="2400" dirty="0">
+                <a:latin typeface="Times New Roman" panose="02020603050405020304" pitchFamily="18" charset="0"/>
+                <a:cs typeface="Times New Roman" panose="02020603050405020304" pitchFamily="18" charset="0"/>
+              </a:rPr>
+              <a:t> экспортировать данные в </a:t>
+            </a:r>
+            <a:r>
+              <a:rPr lang="en-US" sz="2400" dirty="0">
+                <a:latin typeface="Times New Roman" panose="02020603050405020304" pitchFamily="18" charset="0"/>
+                <a:cs typeface="Times New Roman" panose="02020603050405020304" pitchFamily="18" charset="0"/>
+              </a:rPr>
+              <a:t>SQL Server, </a:t>
+            </a:r>
+            <a:r>
+              <a:rPr lang="ru-RU" sz="2400" dirty="0">
+                <a:latin typeface="Times New Roman" panose="02020603050405020304" pitchFamily="18" charset="0"/>
+                <a:cs typeface="Times New Roman" panose="02020603050405020304" pitchFamily="18" charset="0"/>
+              </a:rPr>
+              <a:t>работать с библиотекой </a:t>
+            </a:r>
+            <a:r>
+              <a:rPr lang="en-US" sz="2400" dirty="0" err="1">
+                <a:latin typeface="Times New Roman" panose="02020603050405020304" pitchFamily="18" charset="0"/>
+                <a:cs typeface="Times New Roman" panose="02020603050405020304" pitchFamily="18" charset="0"/>
+              </a:rPr>
+              <a:t>Npgsql.EntityFrameworkCore.PostgreSQL</a:t>
+            </a:r>
+            <a:r>
+              <a:rPr lang="en-US" sz="2400" dirty="0">
+                <a:latin typeface="Times New Roman" panose="02020603050405020304" pitchFamily="18" charset="0"/>
+                <a:cs typeface="Times New Roman" panose="02020603050405020304" pitchFamily="18" charset="0"/>
+              </a:rPr>
+              <a:t>.</a:t>
+            </a:r>
+            <a:endParaRPr lang="ru-RU" sz="2400" dirty="0">
+              <a:latin typeface="Times New Roman" panose="02020603050405020304" pitchFamily="18" charset="0"/>
+              <a:cs typeface="Times New Roman" panose="02020603050405020304" pitchFamily="18" charset="0"/>
+            </a:endParaRPr>
+          </a:p>
+          <a:p>
+            <a:endParaRPr lang="ru-RU" sz="2400" dirty="0"/>
+          </a:p>
+        </p:txBody>
+      </p:sp>
+    </p:spTree>
+    <p:extLst>
+      <p:ext uri="{BB962C8B-B14F-4D97-AF65-F5344CB8AC3E}">
+        <p14:creationId xmlns:p14="http://schemas.microsoft.com/office/powerpoint/2010/main" val="796497954"/>
       </p:ext>
     </p:extLst>
   </p:cSld>
@@ -8688,7 +8910,7 @@
           <p:cNvPr id="2" name="Заголовок 1">
             <a:extLst>
               <a:ext uri="{FF2B5EF4-FFF2-40B4-BE49-F238E27FC236}">
-                <a16:creationId xmlns:a16="http://schemas.microsoft.com/office/drawing/2014/main" id="{B75AF173-E752-3E50-4DE1-C9D058A6625F}"/>
+                <a16:creationId xmlns:a16="http://schemas.microsoft.com/office/drawing/2014/main" id="{A1EC55D8-6565-DC0F-0DE3-D2BA6BE45339}"/>
               </a:ext>
             </a:extLst>
           </p:cNvPr>
@@ -8699,19 +8921,14 @@
             <p:ph type="title"/>
           </p:nvPr>
         </p:nvSpPr>
-        <p:spPr>
-          <a:xfrm>
-            <a:off x="269507" y="149513"/>
-            <a:ext cx="10515600" cy="1325563"/>
-          </a:xfrm>
-        </p:spPr>
+        <p:spPr/>
         <p:txBody>
           <a:bodyPr/>
           <a:lstStyle/>
           <a:p>
             <a:r>
               <a:rPr lang="ru-RU" dirty="0"/>
-              <a:t>День 1: Анализ и проектирование БД</a:t>
+              <a:t>цель</a:t>
             </a:r>
           </a:p>
         </p:txBody>
@@ -8721,7 +8938,7 @@
           <p:cNvPr id="3" name="Объект 2">
             <a:extLst>
               <a:ext uri="{FF2B5EF4-FFF2-40B4-BE49-F238E27FC236}">
-                <a16:creationId xmlns:a16="http://schemas.microsoft.com/office/drawing/2014/main" id="{43BAE4BD-EA2E-BACF-D436-2A8AE6BA2A5C}"/>
+                <a16:creationId xmlns:a16="http://schemas.microsoft.com/office/drawing/2014/main" id="{F0F1BF42-B666-C690-1C51-D105E1E43C23}"/>
               </a:ext>
             </a:extLst>
           </p:cNvPr>
@@ -8732,107 +8949,276 @@
             <p:ph idx="1"/>
           </p:nvPr>
         </p:nvSpPr>
-        <p:spPr>
-          <a:xfrm>
-            <a:off x="656006" y="1253890"/>
-            <a:ext cx="10345074" cy="5108575"/>
-          </a:xfrm>
-        </p:spPr>
+        <p:spPr/>
         <p:txBody>
           <a:bodyPr>
             <a:normAutofit/>
           </a:bodyPr>
           <a:lstStyle/>
           <a:p>
-            <a:pPr marL="0" indent="0">
-              <a:buNone/>
-            </a:pPr>
+            <a:r>
+              <a:rPr lang="ru-RU" sz="2400" dirty="0">
+                <a:latin typeface="Times New Roman" panose="02020603050405020304" pitchFamily="18" charset="0"/>
+                <a:cs typeface="Times New Roman" panose="02020603050405020304" pitchFamily="18" charset="0"/>
+              </a:rPr>
+              <a:t>На основе описания предметной области, текста задания, имеющихся макетов, исходных данных вам необходимо разработать базу данных в выбранной СУБД. </a:t>
+            </a:r>
+          </a:p>
+        </p:txBody>
+      </p:sp>
+    </p:spTree>
+    <p:extLst>
+      <p:ext uri="{BB962C8B-B14F-4D97-AF65-F5344CB8AC3E}">
+        <p14:creationId xmlns:p14="http://schemas.microsoft.com/office/powerpoint/2010/main" val="715497810"/>
+      </p:ext>
+    </p:extLst>
+  </p:cSld>
+  <p:clrMapOvr>
+    <a:masterClrMapping/>
+  </p:clrMapOvr>
+</p:sld>
+</file>
+
+<file path=ppt/slides/slide3.xml><?xml version="1.0" encoding="utf-8"?>
+<p:sld xmlns:a="http://schemas.openxmlformats.org/drawingml/2006/main" xmlns:r="http://schemas.openxmlformats.org/officeDocument/2006/relationships" xmlns:p="http://schemas.openxmlformats.org/presentationml/2006/main">
+  <p:cSld>
+    <p:spTree>
+      <p:nvGrpSpPr>
+        <p:cNvPr id="1" name=""/>
+        <p:cNvGrpSpPr/>
+        <p:nvPr/>
+      </p:nvGrpSpPr>
+      <p:grpSpPr>
+        <a:xfrm>
+          <a:off x="0" y="0"/>
+          <a:ext cx="0" cy="0"/>
+          <a:chOff x="0" y="0"/>
+          <a:chExt cx="0" cy="0"/>
+        </a:xfrm>
+      </p:grpSpPr>
+      <p:sp>
+        <p:nvSpPr>
+          <p:cNvPr id="2" name="Заголовок 1">
+            <a:extLst>
+              <a:ext uri="{FF2B5EF4-FFF2-40B4-BE49-F238E27FC236}">
+                <a16:creationId xmlns:a16="http://schemas.microsoft.com/office/drawing/2014/main" id="{2DD7046B-3DA7-037F-4A79-412CEDC81F6F}"/>
+              </a:ext>
+            </a:extLst>
+          </p:cNvPr>
+          <p:cNvSpPr>
+            <a:spLocks noGrp="1"/>
+          </p:cNvSpPr>
+          <p:nvPr>
+            <p:ph type="title"/>
+          </p:nvPr>
+        </p:nvSpPr>
+        <p:spPr/>
+        <p:txBody>
+          <a:bodyPr/>
+          <a:lstStyle/>
+          <a:p>
+            <a:r>
+              <a:rPr lang="ru-RU" dirty="0">
+                <a:latin typeface="Times New Roman" panose="02020603050405020304" pitchFamily="18" charset="0"/>
+                <a:cs typeface="Times New Roman" panose="02020603050405020304" pitchFamily="18" charset="0"/>
+              </a:rPr>
+              <a:t>Основные задачи</a:t>
+            </a:r>
+          </a:p>
+        </p:txBody>
+      </p:sp>
+      <p:sp>
+        <p:nvSpPr>
+          <p:cNvPr id="3" name="Объект 2">
+            <a:extLst>
+              <a:ext uri="{FF2B5EF4-FFF2-40B4-BE49-F238E27FC236}">
+                <a16:creationId xmlns:a16="http://schemas.microsoft.com/office/drawing/2014/main" id="{622ABCAB-E65E-7A2B-D091-9ED7CAFFFABD}"/>
+              </a:ext>
+            </a:extLst>
+          </p:cNvPr>
+          <p:cNvSpPr>
+            <a:spLocks noGrp="1"/>
+          </p:cNvSpPr>
+          <p:nvPr>
+            <p:ph idx="1"/>
+          </p:nvPr>
+        </p:nvSpPr>
+        <p:spPr/>
+        <p:txBody>
+          <a:bodyPr/>
+          <a:lstStyle/>
+          <a:p>
+            <a:r>
+              <a:rPr lang="ru-RU" dirty="0">
+                <a:latin typeface="Times New Roman" panose="02020603050405020304" pitchFamily="18" charset="0"/>
+                <a:cs typeface="Times New Roman" panose="02020603050405020304" pitchFamily="18" charset="0"/>
+              </a:rPr>
+              <a:t>Разработать диаграмму вариантов использования </a:t>
+            </a:r>
+          </a:p>
+          <a:p>
+            <a:r>
+              <a:rPr lang="ru-RU" dirty="0">
+                <a:latin typeface="Times New Roman" panose="02020603050405020304" pitchFamily="18" charset="0"/>
+                <a:cs typeface="Times New Roman" panose="02020603050405020304" pitchFamily="18" charset="0"/>
+              </a:rPr>
+              <a:t>Разработать </a:t>
+            </a:r>
+            <a:r>
+              <a:rPr lang="en-US" dirty="0">
+                <a:latin typeface="Times New Roman" panose="02020603050405020304" pitchFamily="18" charset="0"/>
+                <a:cs typeface="Times New Roman" panose="02020603050405020304" pitchFamily="18" charset="0"/>
+              </a:rPr>
+              <a:t>ERD-</a:t>
+            </a:r>
+            <a:r>
+              <a:rPr lang="ru-RU" dirty="0">
+                <a:latin typeface="Times New Roman" panose="02020603050405020304" pitchFamily="18" charset="0"/>
+                <a:cs typeface="Times New Roman" panose="02020603050405020304" pitchFamily="18" charset="0"/>
+              </a:rPr>
+              <a:t>Диаграмму </a:t>
+            </a:r>
+          </a:p>
+          <a:p>
+            <a:r>
+              <a:rPr lang="ru-RU" dirty="0">
+                <a:latin typeface="Times New Roman" panose="02020603050405020304" pitchFamily="18" charset="0"/>
+                <a:cs typeface="Times New Roman" panose="02020603050405020304" pitchFamily="18" charset="0"/>
+              </a:rPr>
+              <a:t>Сделать БД в </a:t>
+            </a:r>
+            <a:r>
+              <a:rPr lang="en-US" dirty="0" err="1">
+                <a:latin typeface="Times New Roman" panose="02020603050405020304" pitchFamily="18" charset="0"/>
+                <a:cs typeface="Times New Roman" panose="02020603050405020304" pitchFamily="18" charset="0"/>
+              </a:rPr>
+              <a:t>PostgresSQL</a:t>
+            </a:r>
+            <a:endParaRPr lang="en-US" dirty="0">
+              <a:latin typeface="Times New Roman" panose="02020603050405020304" pitchFamily="18" charset="0"/>
+              <a:cs typeface="Times New Roman" panose="02020603050405020304" pitchFamily="18" charset="0"/>
+            </a:endParaRPr>
+          </a:p>
+          <a:p>
+            <a:r>
+              <a:rPr lang="ru-RU" dirty="0">
+                <a:latin typeface="Times New Roman" panose="02020603050405020304" pitchFamily="18" charset="0"/>
+                <a:cs typeface="Times New Roman" panose="02020603050405020304" pitchFamily="18" charset="0"/>
+              </a:rPr>
+              <a:t>Заполнить данными</a:t>
+            </a:r>
+          </a:p>
+          <a:p>
+            <a:r>
+              <a:rPr lang="ru-RU" dirty="0">
+                <a:latin typeface="Times New Roman" panose="02020603050405020304" pitchFamily="18" charset="0"/>
+                <a:cs typeface="Times New Roman" panose="02020603050405020304" pitchFamily="18" charset="0"/>
+              </a:rPr>
+              <a:t>Сделать миграцию в </a:t>
+            </a:r>
+            <a:r>
+              <a:rPr lang="en-US" dirty="0">
+                <a:latin typeface="Times New Roman" panose="02020603050405020304" pitchFamily="18" charset="0"/>
+                <a:cs typeface="Times New Roman" panose="02020603050405020304" pitchFamily="18" charset="0"/>
+              </a:rPr>
+              <a:t>SQL Server</a:t>
+            </a:r>
+          </a:p>
+          <a:p>
+            <a:r>
+              <a:rPr lang="ru-RU" dirty="0">
+                <a:latin typeface="Times New Roman" panose="02020603050405020304" pitchFamily="18" charset="0"/>
+                <a:cs typeface="Times New Roman" panose="02020603050405020304" pitchFamily="18" charset="0"/>
+              </a:rPr>
+              <a:t>Разработать приложение в </a:t>
+            </a:r>
+            <a:r>
+              <a:rPr lang="en-US" dirty="0">
+                <a:latin typeface="Times New Roman" panose="02020603050405020304" pitchFamily="18" charset="0"/>
+                <a:cs typeface="Times New Roman" panose="02020603050405020304" pitchFamily="18" charset="0"/>
+              </a:rPr>
+              <a:t>C# WPF</a:t>
+            </a:r>
+            <a:endParaRPr lang="ru-RU" dirty="0">
+              <a:latin typeface="Times New Roman" panose="02020603050405020304" pitchFamily="18" charset="0"/>
+              <a:cs typeface="Times New Roman" panose="02020603050405020304" pitchFamily="18" charset="0"/>
+            </a:endParaRPr>
+          </a:p>
+        </p:txBody>
+      </p:sp>
+    </p:spTree>
+    <p:extLst>
+      <p:ext uri="{BB962C8B-B14F-4D97-AF65-F5344CB8AC3E}">
+        <p14:creationId xmlns:p14="http://schemas.microsoft.com/office/powerpoint/2010/main" val="764462960"/>
+      </p:ext>
+    </p:extLst>
+  </p:cSld>
+  <p:clrMapOvr>
+    <a:masterClrMapping/>
+  </p:clrMapOvr>
+</p:sld>
+</file>
+
+<file path=ppt/slides/slide4.xml><?xml version="1.0" encoding="utf-8"?>
+<p:sld xmlns:a="http://schemas.openxmlformats.org/drawingml/2006/main" xmlns:r="http://schemas.openxmlformats.org/officeDocument/2006/relationships" xmlns:p="http://schemas.openxmlformats.org/presentationml/2006/main">
+  <p:cSld>
+    <p:spTree>
+      <p:nvGrpSpPr>
+        <p:cNvPr id="1" name=""/>
+        <p:cNvGrpSpPr/>
+        <p:nvPr/>
+      </p:nvGrpSpPr>
+      <p:grpSpPr>
+        <a:xfrm>
+          <a:off x="0" y="0"/>
+          <a:ext cx="0" cy="0"/>
+          <a:chOff x="0" y="0"/>
+          <a:chExt cx="0" cy="0"/>
+        </a:xfrm>
+      </p:grpSpPr>
+      <p:sp>
+        <p:nvSpPr>
+          <p:cNvPr id="2" name="Заголовок 1">
+            <a:extLst>
+              <a:ext uri="{FF2B5EF4-FFF2-40B4-BE49-F238E27FC236}">
+                <a16:creationId xmlns:a16="http://schemas.microsoft.com/office/drawing/2014/main" id="{C9D85A42-5BC4-933D-A057-01D97190005D}"/>
+              </a:ext>
+            </a:extLst>
+          </p:cNvPr>
+          <p:cNvSpPr>
+            <a:spLocks noGrp="1"/>
+          </p:cNvSpPr>
+          <p:nvPr>
+            <p:ph type="title"/>
+          </p:nvPr>
+        </p:nvSpPr>
+        <p:spPr/>
+        <p:txBody>
+          <a:bodyPr/>
+          <a:lstStyle/>
+          <a:p>
             <a:r>
               <a:rPr lang="ru-RU" dirty="0"/>
-              <a:t>Выполнила: </a:t>
-            </a:r>
-          </a:p>
-          <a:p>
-            <a:pPr marL="514350" indent="-514350">
-              <a:buAutoNum type="arabicParenR"/>
-            </a:pPr>
-            <a:r>
-              <a:rPr lang="en-US" dirty="0"/>
-              <a:t>UML-</a:t>
-            </a:r>
-            <a:r>
-              <a:rPr lang="ru-RU" dirty="0"/>
-              <a:t>диаграмма вариантов использования</a:t>
-            </a:r>
-          </a:p>
-          <a:p>
-            <a:pPr marL="514350" indent="-514350">
-              <a:buAutoNum type="arabicParenR"/>
-            </a:pPr>
-            <a:r>
-              <a:rPr lang="en-US" dirty="0"/>
-              <a:t>ERD</a:t>
-            </a:r>
-            <a:r>
-              <a:rPr lang="ru-RU" dirty="0"/>
-              <a:t>-диаграмма</a:t>
-            </a:r>
-          </a:p>
-          <a:p>
-            <a:pPr marL="514350" indent="-514350">
-              <a:buAutoNum type="arabicParenR"/>
-            </a:pPr>
-            <a:r>
-              <a:rPr lang="ru-RU" dirty="0"/>
-              <a:t>Создание БД в </a:t>
-            </a:r>
-            <a:r>
-              <a:rPr lang="en-US" dirty="0"/>
-              <a:t>PostgreSQL</a:t>
-            </a:r>
-            <a:r>
-              <a:rPr lang="ru-RU" dirty="0"/>
-              <a:t> в 3НФ</a:t>
-            </a:r>
-            <a:endParaRPr lang="en-US" dirty="0"/>
-          </a:p>
-          <a:p>
-            <a:pPr marL="514350" indent="-514350">
-              <a:buAutoNum type="arabicParenR"/>
-            </a:pPr>
-            <a:r>
-              <a:rPr lang="ru-RU" dirty="0"/>
-              <a:t>Экспортировала в </a:t>
-            </a:r>
-            <a:r>
-              <a:rPr lang="en-US" dirty="0"/>
-              <a:t>MS SQL Server</a:t>
-            </a:r>
-          </a:p>
-          <a:p>
-            <a:pPr marL="514350" indent="-514350">
-              <a:buAutoNum type="arabicParenR"/>
-            </a:pPr>
-            <a:r>
-              <a:rPr lang="ru-RU" dirty="0"/>
-              <a:t>Словарь данных</a:t>
+              <a:t>Диаграмма вариантов использования</a:t>
             </a:r>
           </a:p>
         </p:txBody>
       </p:sp>
       <p:pic>
         <p:nvPicPr>
-          <p:cNvPr id="5" name="Рисунок 4">
+          <p:cNvPr id="4" name="Объект 3">
             <a:extLst>
               <a:ext uri="{FF2B5EF4-FFF2-40B4-BE49-F238E27FC236}">
-                <a16:creationId xmlns:a16="http://schemas.microsoft.com/office/drawing/2014/main" id="{C64E2319-CFBF-E6C5-C835-62275F1CB59E}"/>
+                <a16:creationId xmlns:a16="http://schemas.microsoft.com/office/drawing/2014/main" id="{199CADD4-190C-F615-4143-13AE1709FA9D}"/>
               </a:ext>
             </a:extLst>
           </p:cNvPr>
           <p:cNvPicPr>
-            <a:picLocks noChangeAspect="1"/>
+            <a:picLocks noGrp="1" noChangeAspect="1"/>
           </p:cNvPicPr>
-          <p:nvPr/>
+          <p:nvPr>
+            <p:ph idx="1"/>
+          </p:nvPr>
         </p:nvPicPr>
         <p:blipFill>
           <a:blip r:embed="rId2"/>
@@ -8842,8 +9228,8 @@
         </p:blipFill>
         <p:spPr>
           <a:xfrm>
-            <a:off x="7129078" y="917295"/>
-            <a:ext cx="4258501" cy="2709034"/>
+            <a:off x="2737794" y="2284429"/>
+            <a:ext cx="6716412" cy="4272628"/>
           </a:xfrm>
           <a:prstGeom prst="round2DiagRect">
             <a:avLst>
@@ -8866,6 +9252,216 @@
           </a:effectLst>
         </p:spPr>
       </p:pic>
+    </p:spTree>
+    <p:extLst>
+      <p:ext uri="{BB962C8B-B14F-4D97-AF65-F5344CB8AC3E}">
+        <p14:creationId xmlns:p14="http://schemas.microsoft.com/office/powerpoint/2010/main" val="2633761493"/>
+      </p:ext>
+    </p:extLst>
+  </p:cSld>
+  <p:clrMapOvr>
+    <a:masterClrMapping/>
+  </p:clrMapOvr>
+</p:sld>
+</file>
+
+<file path=ppt/slides/slide5.xml><?xml version="1.0" encoding="utf-8"?>
+<p:sld xmlns:a="http://schemas.openxmlformats.org/drawingml/2006/main" xmlns:r="http://schemas.openxmlformats.org/officeDocument/2006/relationships" xmlns:p="http://schemas.openxmlformats.org/presentationml/2006/main">
+  <p:cSld>
+    <p:spTree>
+      <p:nvGrpSpPr>
+        <p:cNvPr id="1" name=""/>
+        <p:cNvGrpSpPr/>
+        <p:nvPr/>
+      </p:nvGrpSpPr>
+      <p:grpSpPr>
+        <a:xfrm>
+          <a:off x="0" y="0"/>
+          <a:ext cx="0" cy="0"/>
+          <a:chOff x="0" y="0"/>
+          <a:chExt cx="0" cy="0"/>
+        </a:xfrm>
+      </p:grpSpPr>
+      <p:sp>
+        <p:nvSpPr>
+          <p:cNvPr id="2" name="Заголовок 1">
+            <a:extLst>
+              <a:ext uri="{FF2B5EF4-FFF2-40B4-BE49-F238E27FC236}">
+                <a16:creationId xmlns:a16="http://schemas.microsoft.com/office/drawing/2014/main" id="{B75AF173-E752-3E50-4DE1-C9D058A6625F}"/>
+              </a:ext>
+            </a:extLst>
+          </p:cNvPr>
+          <p:cNvSpPr>
+            <a:spLocks noGrp="1"/>
+          </p:cNvSpPr>
+          <p:nvPr>
+            <p:ph type="title"/>
+          </p:nvPr>
+        </p:nvSpPr>
+        <p:spPr>
+          <a:xfrm>
+            <a:off x="269507" y="149513"/>
+            <a:ext cx="10515600" cy="1325563"/>
+          </a:xfrm>
+        </p:spPr>
+        <p:txBody>
+          <a:bodyPr/>
+          <a:lstStyle/>
+          <a:p>
+            <a:r>
+              <a:rPr lang="ru-RU" dirty="0">
+                <a:latin typeface="Times New Roman" panose="02020603050405020304" pitchFamily="18" charset="0"/>
+                <a:cs typeface="Times New Roman" panose="02020603050405020304" pitchFamily="18" charset="0"/>
+              </a:rPr>
+              <a:t>День 1: Анализ и проектирование БД</a:t>
+            </a:r>
+          </a:p>
+        </p:txBody>
+      </p:sp>
+      <p:sp>
+        <p:nvSpPr>
+          <p:cNvPr id="3" name="Объект 2">
+            <a:extLst>
+              <a:ext uri="{FF2B5EF4-FFF2-40B4-BE49-F238E27FC236}">
+                <a16:creationId xmlns:a16="http://schemas.microsoft.com/office/drawing/2014/main" id="{43BAE4BD-EA2E-BACF-D436-2A8AE6BA2A5C}"/>
+              </a:ext>
+            </a:extLst>
+          </p:cNvPr>
+          <p:cNvSpPr>
+            <a:spLocks noGrp="1"/>
+          </p:cNvSpPr>
+          <p:nvPr>
+            <p:ph idx="1"/>
+          </p:nvPr>
+        </p:nvSpPr>
+        <p:spPr>
+          <a:xfrm>
+            <a:off x="656006" y="1253890"/>
+            <a:ext cx="10345074" cy="5108575"/>
+          </a:xfrm>
+        </p:spPr>
+        <p:txBody>
+          <a:bodyPr>
+            <a:normAutofit/>
+          </a:bodyPr>
+          <a:lstStyle/>
+          <a:p>
+            <a:pPr marL="0" indent="0">
+              <a:buNone/>
+            </a:pPr>
+            <a:r>
+              <a:rPr lang="ru-RU" dirty="0">
+                <a:latin typeface="Times New Roman" panose="02020603050405020304" pitchFamily="18" charset="0"/>
+                <a:cs typeface="Times New Roman" panose="02020603050405020304" pitchFamily="18" charset="0"/>
+              </a:rPr>
+              <a:t>Выполнила: </a:t>
+            </a:r>
+          </a:p>
+          <a:p>
+            <a:pPr marL="514350" indent="-514350">
+              <a:buAutoNum type="arabicParenR"/>
+            </a:pPr>
+            <a:r>
+              <a:rPr lang="en-US" dirty="0">
+                <a:latin typeface="Times New Roman" panose="02020603050405020304" pitchFamily="18" charset="0"/>
+                <a:cs typeface="Times New Roman" panose="02020603050405020304" pitchFamily="18" charset="0"/>
+              </a:rPr>
+              <a:t>UML-</a:t>
+            </a:r>
+            <a:r>
+              <a:rPr lang="ru-RU" dirty="0">
+                <a:latin typeface="Times New Roman" panose="02020603050405020304" pitchFamily="18" charset="0"/>
+                <a:cs typeface="Times New Roman" panose="02020603050405020304" pitchFamily="18" charset="0"/>
+              </a:rPr>
+              <a:t>диаграмма вариантов использования</a:t>
+            </a:r>
+          </a:p>
+          <a:p>
+            <a:pPr marL="514350" indent="-514350">
+              <a:buAutoNum type="arabicParenR"/>
+            </a:pPr>
+            <a:r>
+              <a:rPr lang="en-US">
+                <a:latin typeface="Times New Roman" panose="02020603050405020304" pitchFamily="18" charset="0"/>
+                <a:cs typeface="Times New Roman" panose="02020603050405020304" pitchFamily="18" charset="0"/>
+              </a:rPr>
+              <a:t>ER</a:t>
+            </a:r>
+            <a:r>
+              <a:rPr lang="ru-RU">
+                <a:latin typeface="Times New Roman" panose="02020603050405020304" pitchFamily="18" charset="0"/>
+                <a:cs typeface="Times New Roman" panose="02020603050405020304" pitchFamily="18" charset="0"/>
+              </a:rPr>
+              <a:t>-диаграмма</a:t>
+            </a:r>
+            <a:endParaRPr lang="ru-RU" dirty="0">
+              <a:latin typeface="Times New Roman" panose="02020603050405020304" pitchFamily="18" charset="0"/>
+              <a:cs typeface="Times New Roman" panose="02020603050405020304" pitchFamily="18" charset="0"/>
+            </a:endParaRPr>
+          </a:p>
+          <a:p>
+            <a:pPr marL="514350" indent="-514350">
+              <a:buAutoNum type="arabicParenR"/>
+            </a:pPr>
+            <a:r>
+              <a:rPr lang="ru-RU" dirty="0">
+                <a:latin typeface="Times New Roman" panose="02020603050405020304" pitchFamily="18" charset="0"/>
+                <a:cs typeface="Times New Roman" panose="02020603050405020304" pitchFamily="18" charset="0"/>
+              </a:rPr>
+              <a:t>Создание БД в </a:t>
+            </a:r>
+            <a:r>
+              <a:rPr lang="en-US" dirty="0">
+                <a:latin typeface="Times New Roman" panose="02020603050405020304" pitchFamily="18" charset="0"/>
+                <a:cs typeface="Times New Roman" panose="02020603050405020304" pitchFamily="18" charset="0"/>
+              </a:rPr>
+              <a:t>PostgreSQL</a:t>
+            </a:r>
+            <a:r>
+              <a:rPr lang="ru-RU" dirty="0">
+                <a:latin typeface="Times New Roman" panose="02020603050405020304" pitchFamily="18" charset="0"/>
+                <a:cs typeface="Times New Roman" panose="02020603050405020304" pitchFamily="18" charset="0"/>
+              </a:rPr>
+              <a:t> в 3НФ</a:t>
+            </a:r>
+            <a:endParaRPr lang="en-US" dirty="0">
+              <a:latin typeface="Times New Roman" panose="02020603050405020304" pitchFamily="18" charset="0"/>
+              <a:cs typeface="Times New Roman" panose="02020603050405020304" pitchFamily="18" charset="0"/>
+            </a:endParaRPr>
+          </a:p>
+          <a:p>
+            <a:pPr marL="514350" indent="-514350">
+              <a:buAutoNum type="arabicParenR"/>
+            </a:pPr>
+            <a:r>
+              <a:rPr lang="ru-RU" dirty="0">
+                <a:latin typeface="Times New Roman" panose="02020603050405020304" pitchFamily="18" charset="0"/>
+                <a:cs typeface="Times New Roman" panose="02020603050405020304" pitchFamily="18" charset="0"/>
+              </a:rPr>
+              <a:t>Экспортировала в </a:t>
+            </a:r>
+            <a:r>
+              <a:rPr lang="en-US" dirty="0">
+                <a:latin typeface="Times New Roman" panose="02020603050405020304" pitchFamily="18" charset="0"/>
+                <a:cs typeface="Times New Roman" panose="02020603050405020304" pitchFamily="18" charset="0"/>
+              </a:rPr>
+              <a:t>MS SQL Server</a:t>
+            </a:r>
+          </a:p>
+          <a:p>
+            <a:pPr marL="514350" indent="-514350">
+              <a:buAutoNum type="arabicParenR"/>
+            </a:pPr>
+            <a:r>
+              <a:rPr lang="ru-RU" dirty="0">
+                <a:latin typeface="Times New Roman" panose="02020603050405020304" pitchFamily="18" charset="0"/>
+                <a:cs typeface="Times New Roman" panose="02020603050405020304" pitchFamily="18" charset="0"/>
+              </a:rPr>
+              <a:t>Словарь данных</a:t>
+            </a:r>
+          </a:p>
+        </p:txBody>
+      </p:sp>
       <p:pic>
         <p:nvPicPr>
           <p:cNvPr id="12" name="Рисунок 11">
@@ -8881,7 +9477,7 @@
           <p:nvPr/>
         </p:nvPicPr>
         <p:blipFill>
-          <a:blip r:embed="rId3"/>
+          <a:blip r:embed="rId2"/>
           <a:stretch>
             <a:fillRect/>
           </a:stretch>
@@ -8911,14 +9507,14 @@
           <p:nvPr/>
         </p:nvPicPr>
         <p:blipFill>
-          <a:blip r:embed="rId4"/>
+          <a:blip r:embed="rId3"/>
           <a:stretch>
             <a:fillRect/>
           </a:stretch>
         </p:blipFill>
         <p:spPr>
           <a:xfrm>
-            <a:off x="2399162" y="4477209"/>
+            <a:off x="6396127" y="1385218"/>
             <a:ext cx="3963190" cy="1816905"/>
           </a:xfrm>
           <a:prstGeom prst="rect">
@@ -8939,7 +9535,7 @@
 </p:sld>
 </file>
 
-<file path=ppt/slides/slide3.xml><?xml version="1.0" encoding="utf-8"?>
+<file path=ppt/slides/slide6.xml><?xml version="1.0" encoding="utf-8"?>
 <p:sld xmlns:a="http://schemas.openxmlformats.org/drawingml/2006/main" xmlns:r="http://schemas.openxmlformats.org/officeDocument/2006/relationships" xmlns:p="http://schemas.openxmlformats.org/presentationml/2006/main">
   <p:cSld>
     <p:spTree>
@@ -8983,7 +9579,10 @@
           <a:lstStyle/>
           <a:p>
             <a:r>
-              <a:rPr lang="ru-RU" dirty="0"/>
+              <a:rPr lang="ru-RU" dirty="0">
+                <a:latin typeface="Times New Roman" panose="02020603050405020304" pitchFamily="18" charset="0"/>
+                <a:cs typeface="Times New Roman" panose="02020603050405020304" pitchFamily="18" charset="0"/>
+              </a:rPr>
               <a:t>День 2: Приложение для посетителя</a:t>
             </a:r>
           </a:p>
@@ -9021,31 +9620,46 @@
               <a:buNone/>
             </a:pPr>
             <a:r>
-              <a:rPr lang="ru-RU" dirty="0"/>
+              <a:rPr lang="ru-RU" dirty="0">
+                <a:latin typeface="Times New Roman" panose="02020603050405020304" pitchFamily="18" charset="0"/>
+                <a:cs typeface="Times New Roman" panose="02020603050405020304" pitchFamily="18" charset="0"/>
+              </a:rPr>
               <a:t>Функционал:</a:t>
             </a:r>
           </a:p>
           <a:p>
             <a:r>
-              <a:rPr lang="ru-RU" dirty="0"/>
+              <a:rPr lang="ru-RU" dirty="0">
+                <a:latin typeface="Times New Roman" panose="02020603050405020304" pitchFamily="18" charset="0"/>
+                <a:cs typeface="Times New Roman" panose="02020603050405020304" pitchFamily="18" charset="0"/>
+              </a:rPr>
               <a:t>Регистрация и авторизация</a:t>
             </a:r>
           </a:p>
           <a:p>
             <a:r>
-              <a:rPr lang="ru-RU" dirty="0"/>
+              <a:rPr lang="ru-RU" dirty="0">
+                <a:latin typeface="Times New Roman" panose="02020603050405020304" pitchFamily="18" charset="0"/>
+                <a:cs typeface="Times New Roman" panose="02020603050405020304" pitchFamily="18" charset="0"/>
+              </a:rPr>
               <a:t>Подача личной и групповой заявки</a:t>
             </a:r>
           </a:p>
           <a:p>
             <a:r>
-              <a:rPr lang="ru-RU" dirty="0"/>
+              <a:rPr lang="ru-RU" dirty="0">
+                <a:latin typeface="Times New Roman" panose="02020603050405020304" pitchFamily="18" charset="0"/>
+                <a:cs typeface="Times New Roman" panose="02020603050405020304" pitchFamily="18" charset="0"/>
+              </a:rPr>
               <a:t>Просмотр своих заявок</a:t>
             </a:r>
           </a:p>
           <a:p>
             <a:r>
-              <a:rPr lang="ru-RU" dirty="0"/>
+              <a:rPr lang="ru-RU" dirty="0">
+                <a:latin typeface="Times New Roman" panose="02020603050405020304" pitchFamily="18" charset="0"/>
+                <a:cs typeface="Times New Roman" panose="02020603050405020304" pitchFamily="18" charset="0"/>
+              </a:rPr>
               <a:t>Прикрепление файлов</a:t>
             </a:r>
           </a:p>
@@ -9214,7 +9828,7 @@
 </p:sld>
 </file>
 
-<file path=ppt/slides/slide4.xml><?xml version="1.0" encoding="utf-8"?>
+<file path=ppt/slides/slide7.xml><?xml version="1.0" encoding="utf-8"?>
 <p:sld xmlns:a="http://schemas.openxmlformats.org/drawingml/2006/main" xmlns:r="http://schemas.openxmlformats.org/officeDocument/2006/relationships" xmlns:p="http://schemas.openxmlformats.org/presentationml/2006/main">
   <p:cSld>
     <p:spTree>
@@ -9258,7 +9872,10 @@
           <a:lstStyle/>
           <a:p>
             <a:r>
-              <a:rPr lang="ru-RU" dirty="0"/>
+              <a:rPr lang="ru-RU" dirty="0">
+                <a:latin typeface="Times New Roman" panose="02020603050405020304" pitchFamily="18" charset="0"/>
+                <a:cs typeface="Times New Roman" panose="02020603050405020304" pitchFamily="18" charset="0"/>
+              </a:rPr>
               <a:t>День 3: Терминал сотрудника общего отдела</a:t>
             </a:r>
           </a:p>
@@ -9296,31 +9913,46 @@
               <a:buNone/>
             </a:pPr>
             <a:r>
-              <a:rPr lang="ru-RU" dirty="0"/>
+              <a:rPr lang="ru-RU" dirty="0">
+                <a:latin typeface="Times New Roman" panose="02020603050405020304" pitchFamily="18" charset="0"/>
+                <a:cs typeface="Times New Roman" panose="02020603050405020304" pitchFamily="18" charset="0"/>
+              </a:rPr>
               <a:t>Функционал:</a:t>
             </a:r>
           </a:p>
           <a:p>
             <a:r>
-              <a:rPr lang="ru-RU" dirty="0"/>
+              <a:rPr lang="ru-RU" dirty="0">
+                <a:latin typeface="Times New Roman" panose="02020603050405020304" pitchFamily="18" charset="0"/>
+                <a:cs typeface="Times New Roman" panose="02020603050405020304" pitchFamily="18" charset="0"/>
+              </a:rPr>
               <a:t>Авторизация по коду сотрудника</a:t>
             </a:r>
           </a:p>
           <a:p>
             <a:r>
-              <a:rPr lang="ru-RU" dirty="0"/>
+              <a:rPr lang="ru-RU" dirty="0">
+                <a:latin typeface="Times New Roman" panose="02020603050405020304" pitchFamily="18" charset="0"/>
+                <a:cs typeface="Times New Roman" panose="02020603050405020304" pitchFamily="18" charset="0"/>
+              </a:rPr>
               <a:t>Просмотр и фильтрация заявок</a:t>
             </a:r>
           </a:p>
           <a:p>
             <a:r>
-              <a:rPr lang="ru-RU" dirty="0"/>
+              <a:rPr lang="ru-RU" dirty="0">
+                <a:latin typeface="Times New Roman" panose="02020603050405020304" pitchFamily="18" charset="0"/>
+                <a:cs typeface="Times New Roman" panose="02020603050405020304" pitchFamily="18" charset="0"/>
+              </a:rPr>
               <a:t>Одобрение/отклонение заявок</a:t>
             </a:r>
           </a:p>
           <a:p>
             <a:r>
-              <a:rPr lang="ru-RU" dirty="0"/>
+              <a:rPr lang="ru-RU" dirty="0">
+                <a:latin typeface="Times New Roman" panose="02020603050405020304" pitchFamily="18" charset="0"/>
+                <a:cs typeface="Times New Roman" panose="02020603050405020304" pitchFamily="18" charset="0"/>
+              </a:rPr>
               <a:t>Проверка черного списка</a:t>
             </a:r>
           </a:p>
@@ -9329,30 +9961,48 @@
               <a:buNone/>
             </a:pPr>
             <a:r>
-              <a:rPr lang="ru-RU" dirty="0"/>
+              <a:rPr lang="ru-RU" dirty="0">
+                <a:latin typeface="Times New Roman" panose="02020603050405020304" pitchFamily="18" charset="0"/>
+                <a:cs typeface="Times New Roman" panose="02020603050405020304" pitchFamily="18" charset="0"/>
+              </a:rPr>
               <a:t>Создано:</a:t>
             </a:r>
           </a:p>
           <a:p>
             <a:r>
-              <a:rPr lang="ru-RU" dirty="0"/>
+              <a:rPr lang="ru-RU" dirty="0">
+                <a:latin typeface="Times New Roman" panose="02020603050405020304" pitchFamily="18" charset="0"/>
+                <a:cs typeface="Times New Roman" panose="02020603050405020304" pitchFamily="18" charset="0"/>
+              </a:rPr>
               <a:t>Представление </a:t>
             </a:r>
             <a:r>
-              <a:rPr lang="en-US" dirty="0"/>
+              <a:rPr lang="en-US" dirty="0">
+                <a:latin typeface="Times New Roman" panose="02020603050405020304" pitchFamily="18" charset="0"/>
+                <a:cs typeface="Times New Roman" panose="02020603050405020304" pitchFamily="18" charset="0"/>
+              </a:rPr>
               <a:t>ViewListRequests</a:t>
             </a:r>
           </a:p>
           <a:p>
             <a:r>
-              <a:rPr lang="ru-RU" dirty="0"/>
+              <a:rPr lang="ru-RU" dirty="0">
+                <a:latin typeface="Times New Roman" panose="02020603050405020304" pitchFamily="18" charset="0"/>
+                <a:cs typeface="Times New Roman" panose="02020603050405020304" pitchFamily="18" charset="0"/>
+              </a:rPr>
               <a:t>Хранимая процедура </a:t>
             </a:r>
             <a:r>
-              <a:rPr lang="en-US" dirty="0"/>
+              <a:rPr lang="en-US" dirty="0">
+                <a:latin typeface="Times New Roman" panose="02020603050405020304" pitchFamily="18" charset="0"/>
+                <a:cs typeface="Times New Roman" panose="02020603050405020304" pitchFamily="18" charset="0"/>
+              </a:rPr>
               <a:t>FilteringRequests</a:t>
             </a:r>
-            <a:endParaRPr lang="ru-RU" dirty="0"/>
+            <a:endParaRPr lang="ru-RU" dirty="0">
+              <a:latin typeface="Times New Roman" panose="02020603050405020304" pitchFamily="18" charset="0"/>
+              <a:cs typeface="Times New Roman" panose="02020603050405020304" pitchFamily="18" charset="0"/>
+            </a:endParaRPr>
           </a:p>
         </p:txBody>
       </p:sp>
@@ -9489,7 +10139,7 @@
 </p:sld>
 </file>
 
-<file path=ppt/slides/slide5.xml><?xml version="1.0" encoding="utf-8"?>
+<file path=ppt/slides/slide8.xml><?xml version="1.0" encoding="utf-8"?>
 <p:sld xmlns:a="http://schemas.openxmlformats.org/drawingml/2006/main" xmlns:r="http://schemas.openxmlformats.org/officeDocument/2006/relationships" xmlns:p="http://schemas.openxmlformats.org/presentationml/2006/main">
   <p:cSld>
     <p:spTree>
@@ -9539,7 +10189,10 @@
           <a:lstStyle/>
           <a:p>
             <a:r>
-              <a:rPr lang="ru-RU" dirty="0"/>
+              <a:rPr lang="ru-RU" dirty="0">
+                <a:latin typeface="Times New Roman" panose="02020603050405020304" pitchFamily="18" charset="0"/>
+                <a:cs typeface="Times New Roman" panose="02020603050405020304" pitchFamily="18" charset="0"/>
+              </a:rPr>
               <a:t>День 4: Терминал охраны и подразделения</a:t>
             </a:r>
           </a:p>
@@ -9577,25 +10230,37 @@
               <a:buNone/>
             </a:pPr>
             <a:r>
-              <a:rPr lang="ru-RU" dirty="0"/>
+              <a:rPr lang="ru-RU" dirty="0">
+                <a:latin typeface="Times New Roman" panose="02020603050405020304" pitchFamily="18" charset="0"/>
+                <a:cs typeface="Times New Roman" panose="02020603050405020304" pitchFamily="18" charset="0"/>
+              </a:rPr>
               <a:t>Терминал охраны:</a:t>
             </a:r>
           </a:p>
           <a:p>
             <a:r>
-              <a:rPr lang="ru-RU" dirty="0"/>
+              <a:rPr lang="ru-RU" dirty="0">
+                <a:latin typeface="Times New Roman" panose="02020603050405020304" pitchFamily="18" charset="0"/>
+                <a:cs typeface="Times New Roman" panose="02020603050405020304" pitchFamily="18" charset="0"/>
+              </a:rPr>
               <a:t>Просмотр одобренных заявок</a:t>
             </a:r>
           </a:p>
           <a:p>
             <a:r>
-              <a:rPr lang="ru-RU" dirty="0"/>
+              <a:rPr lang="ru-RU" dirty="0">
+                <a:latin typeface="Times New Roman" panose="02020603050405020304" pitchFamily="18" charset="0"/>
+                <a:cs typeface="Times New Roman" panose="02020603050405020304" pitchFamily="18" charset="0"/>
+              </a:rPr>
               <a:t>Поиск по ФИО/паспорту</a:t>
             </a:r>
           </a:p>
           <a:p>
             <a:r>
-              <a:rPr lang="ru-RU" dirty="0"/>
+              <a:rPr lang="ru-RU" dirty="0">
+                <a:latin typeface="Times New Roman" panose="02020603050405020304" pitchFamily="18" charset="0"/>
+                <a:cs typeface="Times New Roman" panose="02020603050405020304" pitchFamily="18" charset="0"/>
+              </a:rPr>
               <a:t>Разрешение доступа</a:t>
             </a:r>
           </a:p>
@@ -9604,20 +10269,32 @@
               <a:buNone/>
             </a:pPr>
             <a:r>
-              <a:rPr lang="ru-RU" dirty="0"/>
+              <a:rPr lang="ru-RU" dirty="0">
+                <a:latin typeface="Times New Roman" panose="02020603050405020304" pitchFamily="18" charset="0"/>
+                <a:cs typeface="Times New Roman" panose="02020603050405020304" pitchFamily="18" charset="0"/>
+              </a:rPr>
               <a:t>Терминал подразделения:</a:t>
             </a:r>
           </a:p>
           <a:p>
             <a:r>
-              <a:rPr lang="ru-RU" dirty="0"/>
+              <a:rPr lang="ru-RU" dirty="0">
+                <a:latin typeface="Times New Roman" panose="02020603050405020304" pitchFamily="18" charset="0"/>
+                <a:cs typeface="Times New Roman" panose="02020603050405020304" pitchFamily="18" charset="0"/>
+              </a:rPr>
               <a:t>Фиксация входа/выхода</a:t>
             </a:r>
-            <a:endParaRPr lang="en-US" dirty="0"/>
-          </a:p>
-          <a:p>
-            <a:r>
-              <a:rPr lang="ru-RU" dirty="0"/>
+            <a:endParaRPr lang="en-US" dirty="0">
+              <a:latin typeface="Times New Roman" panose="02020603050405020304" pitchFamily="18" charset="0"/>
+              <a:cs typeface="Times New Roman" panose="02020603050405020304" pitchFamily="18" charset="0"/>
+            </a:endParaRPr>
+          </a:p>
+          <a:p>
+            <a:r>
+              <a:rPr lang="ru-RU" dirty="0">
+                <a:latin typeface="Times New Roman" panose="02020603050405020304" pitchFamily="18" charset="0"/>
+                <a:cs typeface="Times New Roman" panose="02020603050405020304" pitchFamily="18" charset="0"/>
+              </a:rPr>
               <a:t>Добавление в черный список</a:t>
             </a:r>
           </a:p>
@@ -9626,19 +10303,28 @@
               <a:buNone/>
             </a:pPr>
             <a:r>
-              <a:rPr lang="ru-RU" dirty="0"/>
+              <a:rPr lang="ru-RU" dirty="0">
+                <a:latin typeface="Times New Roman" panose="02020603050405020304" pitchFamily="18" charset="0"/>
+                <a:cs typeface="Times New Roman" panose="02020603050405020304" pitchFamily="18" charset="0"/>
+              </a:rPr>
               <a:t>Создано:</a:t>
             </a:r>
           </a:p>
           <a:p>
             <a:r>
-              <a:rPr lang="ru-RU" dirty="0"/>
+              <a:rPr lang="ru-RU" dirty="0">
+                <a:latin typeface="Times New Roman" panose="02020603050405020304" pitchFamily="18" charset="0"/>
+                <a:cs typeface="Times New Roman" panose="02020603050405020304" pitchFamily="18" charset="0"/>
+              </a:rPr>
               <a:t>Триггер генерации логина</a:t>
             </a:r>
           </a:p>
           <a:p>
             <a:r>
-              <a:rPr lang="ru-RU" dirty="0"/>
+              <a:rPr lang="ru-RU" dirty="0">
+                <a:latin typeface="Times New Roman" panose="02020603050405020304" pitchFamily="18" charset="0"/>
+                <a:cs typeface="Times New Roman" panose="02020603050405020304" pitchFamily="18" charset="0"/>
+              </a:rPr>
               <a:t>Диаграмма деятельности</a:t>
             </a:r>
           </a:p>
@@ -9747,7 +10433,7 @@
 </p:sld>
 </file>
 
-<file path=ppt/slides/slide6.xml><?xml version="1.0" encoding="utf-8"?>
+<file path=ppt/slides/slide9.xml><?xml version="1.0" encoding="utf-8"?>
 <p:sld xmlns:a="http://schemas.openxmlformats.org/drawingml/2006/main" xmlns:r="http://schemas.openxmlformats.org/officeDocument/2006/relationships" xmlns:p="http://schemas.openxmlformats.org/presentationml/2006/main">
   <p:cSld>
     <p:spTree>
@@ -9797,7 +10483,10 @@
           <a:lstStyle/>
           <a:p>
             <a:r>
-              <a:rPr lang="ru-RU" dirty="0"/>
+              <a:rPr lang="ru-RU" dirty="0">
+                <a:latin typeface="Times New Roman" panose="02020603050405020304" pitchFamily="18" charset="0"/>
+                <a:cs typeface="Times New Roman" panose="02020603050405020304" pitchFamily="18" charset="0"/>
+              </a:rPr>
               <a:t>День 5: Отчеты и документация</a:t>
             </a:r>
           </a:p>
@@ -9835,25 +10524,37 @@
               <a:buNone/>
             </a:pPr>
             <a:r>
-              <a:rPr lang="ru-RU" dirty="0"/>
+              <a:rPr lang="ru-RU" dirty="0">
+                <a:latin typeface="Times New Roman" panose="02020603050405020304" pitchFamily="18" charset="0"/>
+                <a:cs typeface="Times New Roman" panose="02020603050405020304" pitchFamily="18" charset="0"/>
+              </a:rPr>
               <a:t>Отчеты:</a:t>
             </a:r>
           </a:p>
           <a:p>
             <a:r>
-              <a:rPr lang="ru-RU" dirty="0"/>
+              <a:rPr lang="ru-RU" dirty="0">
+                <a:latin typeface="Times New Roman" panose="02020603050405020304" pitchFamily="18" charset="0"/>
+                <a:cs typeface="Times New Roman" panose="02020603050405020304" pitchFamily="18" charset="0"/>
+              </a:rPr>
               <a:t>Количество посещений </a:t>
             </a:r>
           </a:p>
           <a:p>
             <a:r>
-              <a:rPr lang="ru-RU" dirty="0"/>
+              <a:rPr lang="ru-RU" dirty="0">
+                <a:latin typeface="Times New Roman" panose="02020603050405020304" pitchFamily="18" charset="0"/>
+                <a:cs typeface="Times New Roman" panose="02020603050405020304" pitchFamily="18" charset="0"/>
+              </a:rPr>
               <a:t>Список лиц на территории</a:t>
             </a:r>
           </a:p>
           <a:p>
             <a:r>
-              <a:rPr lang="ru-RU" dirty="0"/>
+              <a:rPr lang="ru-RU" dirty="0">
+                <a:latin typeface="Times New Roman" panose="02020603050405020304" pitchFamily="18" charset="0"/>
+                <a:cs typeface="Times New Roman" panose="02020603050405020304" pitchFamily="18" charset="0"/>
+              </a:rPr>
               <a:t>Автосохранение каждые 3 часа</a:t>
             </a:r>
           </a:p>
@@ -9862,32 +10563,50 @@
               <a:buNone/>
             </a:pPr>
             <a:r>
-              <a:rPr lang="ru-RU" dirty="0"/>
+              <a:rPr lang="ru-RU" dirty="0">
+                <a:latin typeface="Times New Roman" panose="02020603050405020304" pitchFamily="18" charset="0"/>
+                <a:cs typeface="Times New Roman" panose="02020603050405020304" pitchFamily="18" charset="0"/>
+              </a:rPr>
               <a:t>Документация:</a:t>
             </a:r>
           </a:p>
           <a:p>
             <a:r>
-              <a:rPr lang="ru-RU" dirty="0"/>
+              <a:rPr lang="ru-RU" dirty="0">
+                <a:latin typeface="Times New Roman" panose="02020603050405020304" pitchFamily="18" charset="0"/>
+                <a:cs typeface="Times New Roman" panose="02020603050405020304" pitchFamily="18" charset="0"/>
+              </a:rPr>
               <a:t>Диаграмма вариантов использования</a:t>
             </a:r>
-            <a:endParaRPr lang="en-US" dirty="0"/>
-          </a:p>
-          <a:p>
-            <a:r>
-              <a:rPr lang="ru-RU" dirty="0"/>
+            <a:endParaRPr lang="en-US" dirty="0">
+              <a:latin typeface="Times New Roman" panose="02020603050405020304" pitchFamily="18" charset="0"/>
+              <a:cs typeface="Times New Roman" panose="02020603050405020304" pitchFamily="18" charset="0"/>
+            </a:endParaRPr>
+          </a:p>
+          <a:p>
+            <a:r>
+              <a:rPr lang="ru-RU" dirty="0">
+                <a:latin typeface="Times New Roman" panose="02020603050405020304" pitchFamily="18" charset="0"/>
+                <a:cs typeface="Times New Roman" panose="02020603050405020304" pitchFamily="18" charset="0"/>
+              </a:rPr>
               <a:t>Дневник практики</a:t>
             </a:r>
           </a:p>
           <a:p>
             <a:r>
-              <a:rPr lang="ru-RU" dirty="0"/>
+              <a:rPr lang="ru-RU" dirty="0">
+                <a:latin typeface="Times New Roman" panose="02020603050405020304" pitchFamily="18" charset="0"/>
+                <a:cs typeface="Times New Roman" panose="02020603050405020304" pitchFamily="18" charset="0"/>
+              </a:rPr>
               <a:t>Аттестационный лист</a:t>
             </a:r>
           </a:p>
           <a:p>
             <a:r>
-              <a:rPr lang="ru-RU" dirty="0"/>
+              <a:rPr lang="ru-RU" dirty="0">
+                <a:latin typeface="Times New Roman" panose="02020603050405020304" pitchFamily="18" charset="0"/>
+                <a:cs typeface="Times New Roman" panose="02020603050405020304" pitchFamily="18" charset="0"/>
+              </a:rPr>
               <a:t>Отчет по практике</a:t>
             </a:r>
           </a:p>
